--- a/TrainerDocs/Session_05_Advanced_Prompting_Reliability_Guardrails.pptx
+++ b/TrainerDocs/Session_05_Advanced_Prompting_Reliability_Guardrails.pptx
@@ -240,7 +240,7 @@
           <a:p>
             <a:fld id="{B4C301A1-7579-43AC-A922-50F95444390D}" type="datetimeFigureOut">
               <a:rPr lang="en-IN" smtClean="0"/>
-              <a:t>18-10-2026</a:t>
+              <a:t>29-10-2026</a:t>
             </a:fld>
             <a:endParaRPr lang="en-IN"/>
           </a:p>
@@ -687,7 +687,7 @@
           <a:p>
             <a:fld id="{BD379DF7-D0DB-4F27-A49F-D9EF296CC673}" type="datetime1">
               <a:rPr lang="en-US" smtClean="0"/>
-              <a:t>10/18/2026</a:t>
+              <a:t>10/29/2026</a:t>
             </a:fld>
             <a:endParaRPr lang="en-US"/>
           </a:p>
@@ -855,7 +855,7 @@
           <a:p>
             <a:fld id="{27B5990D-64F7-4A9D-BF12-16487AA1BADD}" type="datetime1">
               <a:rPr lang="en-US" smtClean="0"/>
-              <a:t>10/18/2026</a:t>
+              <a:t>10/29/2026</a:t>
             </a:fld>
             <a:endParaRPr lang="en-US"/>
           </a:p>
@@ -1033,7 +1033,7 @@
           <a:p>
             <a:fld id="{951FAF03-5AC6-4FCA-BA0D-6EA488BB1102}" type="datetime1">
               <a:rPr lang="en-US" smtClean="0"/>
-              <a:t>10/18/2026</a:t>
+              <a:t>10/29/2026</a:t>
             </a:fld>
             <a:endParaRPr lang="en-US"/>
           </a:p>
@@ -1201,7 +1201,7 @@
           <a:p>
             <a:fld id="{62F3DF2E-CBA4-478E-ADAB-9634F3BB042E}" type="datetime1">
               <a:rPr lang="en-US" smtClean="0"/>
-              <a:t>10/18/2026</a:t>
+              <a:t>10/29/2026</a:t>
             </a:fld>
             <a:endParaRPr lang="en-US"/>
           </a:p>
@@ -1446,7 +1446,7 @@
           <a:p>
             <a:fld id="{35DBC3F4-EDAC-4BDF-AB5C-54DF49B5E1BB}" type="datetime1">
               <a:rPr lang="en-US" smtClean="0"/>
-              <a:t>10/18/2026</a:t>
+              <a:t>10/29/2026</a:t>
             </a:fld>
             <a:endParaRPr lang="en-US"/>
           </a:p>
@@ -1731,7 +1731,7 @@
           <a:p>
             <a:fld id="{EB1C4872-096D-4935-B3EF-6CD5459B287C}" type="datetime1">
               <a:rPr lang="en-US" smtClean="0"/>
-              <a:t>10/18/2026</a:t>
+              <a:t>10/29/2026</a:t>
             </a:fld>
             <a:endParaRPr lang="en-US"/>
           </a:p>
@@ -2150,7 +2150,7 @@
           <a:p>
             <a:fld id="{7ABD868B-FEF6-49B1-960B-6926FAE04C22}" type="datetime1">
               <a:rPr lang="en-US" smtClean="0"/>
-              <a:t>10/18/2026</a:t>
+              <a:t>10/29/2026</a:t>
             </a:fld>
             <a:endParaRPr lang="en-US"/>
           </a:p>
@@ -2267,7 +2267,7 @@
           <a:p>
             <a:fld id="{578202AB-823B-4A3D-B371-2F4EE525E4A7}" type="datetime1">
               <a:rPr lang="en-US" smtClean="0"/>
-              <a:t>10/18/2026</a:t>
+              <a:t>10/29/2026</a:t>
             </a:fld>
             <a:endParaRPr lang="en-US"/>
           </a:p>
@@ -2362,7 +2362,7 @@
           <a:p>
             <a:fld id="{447F61E2-AF3F-473E-9B26-CF72629B8EBB}" type="datetime1">
               <a:rPr lang="en-US" smtClean="0"/>
-              <a:t>10/18/2026</a:t>
+              <a:t>10/29/2026</a:t>
             </a:fld>
             <a:endParaRPr lang="en-US"/>
           </a:p>
@@ -2642,7 +2642,7 @@
           <a:p>
             <a:fld id="{C731BD58-E5E3-4AEC-BD2E-0FC81399356F}" type="datetime1">
               <a:rPr lang="en-US" smtClean="0"/>
-              <a:t>10/18/2026</a:t>
+              <a:t>10/29/2026</a:t>
             </a:fld>
             <a:endParaRPr lang="en-US"/>
           </a:p>
@@ -2894,7 +2894,7 @@
           <a:p>
             <a:fld id="{BC80B159-F723-4998-BDC9-F515271A1D6F}" type="datetime1">
               <a:rPr lang="en-US" smtClean="0"/>
-              <a:t>10/18/2026</a:t>
+              <a:t>10/29/2026</a:t>
             </a:fld>
             <a:endParaRPr lang="en-US"/>
           </a:p>
@@ -3105,7 +3105,7 @@
           <a:p>
             <a:fld id="{2A9FC6A7-FCCE-4AF7-85B2-61869BC770DB}" type="datetime1">
               <a:rPr lang="en-US" smtClean="0"/>
-              <a:t>10/18/2026</a:t>
+              <a:t>10/29/2026</a:t>
             </a:fld>
             <a:endParaRPr lang="en-US"/>
           </a:p>
@@ -6427,7 +6427,7 @@
         <p:spPr>
           <a:xfrm>
             <a:off x="804672" y="5321808"/>
-            <a:ext cx="10698480" cy="713232"/>
+            <a:ext cx="10698480" cy="609398"/>
           </a:xfrm>
           <a:prstGeom prst="rect">
             <a:avLst/>
@@ -6452,7 +6452,24 @@
               </a:defRPr>
             </a:pPr>
             <a:r>
-              <a:t>•  A claim may be true yet remain unsupported by the supplied documents. Coherence is not evidence.</a:t>
+              <a:rPr dirty="0"/>
+              <a:t>•  A claim may be true yet remain unsupported by the supplied documents. Coherence</a:t>
+            </a:r>
+            <a:r>
+              <a:rPr lang="en-US" dirty="0"/>
+              <a:t> (</a:t>
+            </a:r>
+            <a:r>
+              <a:rPr lang="en-US" i="1" dirty="0"/>
+              <a:t>consistency</a:t>
+            </a:r>
+            <a:r>
+              <a:rPr lang="en-US" dirty="0"/>
+              <a:t>)</a:t>
+            </a:r>
+            <a:r>
+              <a:rPr dirty="0"/>
+              <a:t> is not evidence.</a:t>
             </a:r>
           </a:p>
         </p:txBody>
@@ -7177,7 +7194,7 @@
             </a:pPr>
             <a:r>
               <a:rPr lang="en-US" dirty="0"/>
-              <a:t>•  Maximum score: 10. Critical factual errors or constraint violations require correction regardless of score.</a:t>
+              <a:t>•  Critical factual errors or constraint violations require correction regardless of score.</a:t>
             </a:r>
           </a:p>
           <a:p>
@@ -8696,7 +8713,7 @@
         </p:nvSpPr>
         <p:spPr>
           <a:xfrm>
-            <a:off x="804672" y="1349093"/>
+            <a:off x="804672" y="1632557"/>
             <a:ext cx="10698480" cy="301621"/>
           </a:xfrm>
           <a:prstGeom prst="rect">
@@ -8723,7 +8740,15 @@
             </a:pPr>
             <a:r>
               <a:rPr dirty="0"/>
-              <a:t>•  INPUT: validate inputs and minimize unnecessary sensitive data.</a:t>
+              <a:t>•  </a:t>
+            </a:r>
+            <a:r>
+              <a:rPr b="1" dirty="0"/>
+              <a:t>INPUT</a:t>
+            </a:r>
+            <a:r>
+              <a:rPr dirty="0"/>
+              <a:t>: validate inputs and minimize unnecessary sensitive data.</a:t>
             </a:r>
             <a:endParaRPr lang="en-US" dirty="0"/>
           </a:p>
@@ -8737,7 +8762,7 @@
         </p:nvSpPr>
         <p:spPr>
           <a:xfrm>
-            <a:off x="804672" y="1664490"/>
+            <a:off x="804672" y="1947954"/>
             <a:ext cx="10698480" cy="301621"/>
           </a:xfrm>
           <a:prstGeom prst="rect">
@@ -8764,7 +8789,15 @@
             </a:pPr>
             <a:r>
               <a:rPr dirty="0"/>
-              <a:t>•  INSTRUCTION: state approved objectives, rules and boundaries.</a:t>
+              <a:t>•  </a:t>
+            </a:r>
+            <a:r>
+              <a:rPr b="1" dirty="0"/>
+              <a:t>INSTRUCTION</a:t>
+            </a:r>
+            <a:r>
+              <a:rPr dirty="0"/>
+              <a:t>: state approved objectives, rules and boundaries.</a:t>
             </a:r>
             <a:endParaRPr lang="en-US" dirty="0"/>
           </a:p>
@@ -8778,7 +8811,7 @@
         </p:nvSpPr>
         <p:spPr>
           <a:xfrm>
-            <a:off x="804672" y="1952455"/>
+            <a:off x="804672" y="2235919"/>
             <a:ext cx="10698480" cy="301621"/>
           </a:xfrm>
           <a:prstGeom prst="rect">
@@ -8805,7 +8838,15 @@
             </a:pPr>
             <a:r>
               <a:rPr dirty="0"/>
-              <a:t>•  PROCESSING: separate trusted instructions from untrusted source content.</a:t>
+              <a:t>•  </a:t>
+            </a:r>
+            <a:r>
+              <a:rPr b="1" dirty="0"/>
+              <a:t>PROCESSING</a:t>
+            </a:r>
+            <a:r>
+              <a:rPr dirty="0"/>
+              <a:t>: separate trusted instructions from untrusted source content.</a:t>
             </a:r>
             <a:endParaRPr lang="en-US" dirty="0"/>
           </a:p>
@@ -8819,7 +8860,7 @@
         </p:nvSpPr>
         <p:spPr>
           <a:xfrm>
-            <a:off x="804672" y="2276996"/>
+            <a:off x="804672" y="2560460"/>
             <a:ext cx="10698480" cy="301621"/>
           </a:xfrm>
           <a:prstGeom prst="rect">
@@ -8846,7 +8887,15 @@
             </a:pPr>
             <a:r>
               <a:rPr dirty="0"/>
-              <a:t>•  OUTPUT: validate format, evidence and prohibited content.</a:t>
+              <a:t>•  </a:t>
+            </a:r>
+            <a:r>
+              <a:rPr b="1" dirty="0"/>
+              <a:t>OUTPUT</a:t>
+            </a:r>
+            <a:r>
+              <a:rPr dirty="0"/>
+              <a:t>: validate format, evidence and prohibited content.</a:t>
             </a:r>
             <a:endParaRPr lang="en-US" dirty="0"/>
           </a:p>
@@ -8860,7 +8909,7 @@
         </p:nvSpPr>
         <p:spPr>
           <a:xfrm>
-            <a:off x="804672" y="2592393"/>
+            <a:off x="804672" y="2875857"/>
             <a:ext cx="10698480" cy="301621"/>
           </a:xfrm>
           <a:prstGeom prst="rect">
@@ -8887,7 +8936,15 @@
             </a:pPr>
             <a:r>
               <a:rPr dirty="0"/>
-              <a:t>•  HUMAN CONTROL: require review or approval for consequential decisions and actions.</a:t>
+              <a:t>•  </a:t>
+            </a:r>
+            <a:r>
+              <a:rPr b="1" dirty="0"/>
+              <a:t>HUMAN CONTROL</a:t>
+            </a:r>
+            <a:r>
+              <a:rPr dirty="0"/>
+              <a:t>: require review or approval for consequential decisions and actions.</a:t>
             </a:r>
             <a:endParaRPr lang="en-US" dirty="0"/>
           </a:p>
@@ -8901,7 +8958,7 @@
         </p:nvSpPr>
         <p:spPr>
           <a:xfrm>
-            <a:off x="804672" y="2907792"/>
+            <a:off x="804672" y="4018981"/>
             <a:ext cx="10698480" cy="301621"/>
           </a:xfrm>
           <a:prstGeom prst="rect">
@@ -8928,7 +8985,7 @@
             </a:pPr>
             <a:r>
               <a:rPr dirty="0"/>
-              <a:t>•  Prompts do not replace access controls, secure design, policy enforcement, testing or accountability.</a:t>
+              <a:t>Prompts do not replace access controls, secure design, policy enforcement, testing or accountability.</a:t>
             </a:r>
             <a:endParaRPr lang="en-US" dirty="0"/>
           </a:p>
@@ -8999,6 +9056,52 @@
               <a:t>19</a:t>
             </a:fld>
             <a:endParaRPr lang="en-US"/>
+          </a:p>
+        </p:txBody>
+      </p:sp>
+      <p:sp>
+        <p:nvSpPr>
+          <p:cNvPr id="14" name="TextBox 13">
+            <a:extLst>
+              <a:ext uri="{FF2B5EF4-FFF2-40B4-BE49-F238E27FC236}">
+                <a16:creationId xmlns:a16="http://schemas.microsoft.com/office/drawing/2014/main" id="{7E178983-B175-4A81-3A5B-76D766C4D5F5}"/>
+              </a:ext>
+            </a:extLst>
+          </p:cNvPr>
+          <p:cNvSpPr txBox="1"/>
+          <p:nvPr/>
+        </p:nvSpPr>
+        <p:spPr>
+          <a:xfrm>
+            <a:off x="804672" y="1246106"/>
+            <a:ext cx="10698480" cy="301621"/>
+          </a:xfrm>
+          <a:prstGeom prst="rect">
+            <a:avLst/>
+          </a:prstGeom>
+          <a:noFill/>
+        </p:spPr>
+        <p:txBody>
+          <a:bodyPr wrap="square" lIns="73152" tIns="36576" rIns="73152" bIns="18288">
+            <a:spAutoFit/>
+          </a:bodyPr>
+          <a:lstStyle/>
+          <a:p>
+            <a:pPr>
+              <a:spcAft>
+                <a:spcPts val="300"/>
+              </a:spcAft>
+              <a:defRPr sz="1600" b="0">
+                <a:solidFill>
+                  <a:srgbClr val="2B333D"/>
+                </a:solidFill>
+                <a:latin typeface="Aptos"/>
+              </a:defRPr>
+            </a:pPr>
+            <a:r>
+              <a:rPr lang="en-US" b="1" dirty="0"/>
+              <a:t>Organize Guardrails into five layers:</a:t>
+            </a:r>
           </a:p>
         </p:txBody>
       </p:sp>
@@ -15934,45 +16037,6 @@
       </p:sp>
       <p:sp>
         <p:nvSpPr>
-          <p:cNvPr id="3" name="TextBox 2"/>
-          <p:cNvSpPr txBox="1"/>
-          <p:nvPr/>
-        </p:nvSpPr>
-        <p:spPr>
-          <a:xfrm>
-            <a:off x="530352" y="758952"/>
-            <a:ext cx="10972800" cy="228600"/>
-          </a:xfrm>
-          <a:prstGeom prst="rect">
-            <a:avLst/>
-          </a:prstGeom>
-          <a:noFill/>
-        </p:spPr>
-        <p:txBody>
-          <a:bodyPr wrap="square" lIns="73152" tIns="36576" rIns="73152" bIns="18288">
-            <a:spAutoFit/>
-          </a:bodyPr>
-          <a:lstStyle/>
-          <a:p>
-            <a:pPr>
-              <a:spcAft>
-                <a:spcPts val="300"/>
-              </a:spcAft>
-              <a:defRPr sz="900" b="1">
-                <a:solidFill>
-                  <a:srgbClr val="008491"/>
-                </a:solidFill>
-                <a:latin typeface="Aptos"/>
-              </a:defRPr>
-            </a:pPr>
-            <a:r>
-              <a:t>OPENING</a:t>
-            </a:r>
-          </a:p>
-        </p:txBody>
-      </p:sp>
-      <p:sp>
-        <p:nvSpPr>
           <p:cNvPr id="4" name="Rectangle 3"/>
           <p:cNvSpPr/>
           <p:nvPr/>
@@ -16070,7 +16134,7 @@
         <p:spPr>
           <a:xfrm>
             <a:off x="822960" y="1444752"/>
-            <a:ext cx="10515600" cy="1725088"/>
+            <a:ext cx="10515600" cy="2009781"/>
           </a:xfrm>
           <a:prstGeom prst="rect">
             <a:avLst/>
@@ -16083,10 +16147,12 @@
           </a:bodyPr>
           <a:lstStyle/>
           <a:p>
-            <a:pPr>
-              <a:spcAft>
-                <a:spcPts val="300"/>
-              </a:spcAft>
+            <a:pPr marL="285750" indent="-285750">
+              <a:spcAft>
+                <a:spcPts val="300"/>
+              </a:spcAft>
+              <a:buFont typeface="Arial" panose="020B0604020202020204" pitchFamily="34" charset="0"/>
+              <a:buChar char="•"/>
               <a:defRPr sz="1400" b="0">
                 <a:solidFill>
                   <a:srgbClr val="2B333D"/>
@@ -16097,10 +16163,12 @@
             <a:endParaRPr lang="en-US" sz="1600" dirty="0"/>
           </a:p>
           <a:p>
-            <a:pPr>
-              <a:spcAft>
-                <a:spcPts val="300"/>
-              </a:spcAft>
+            <a:pPr marL="285750" indent="-285750">
+              <a:spcAft>
+                <a:spcPts val="300"/>
+              </a:spcAft>
+              <a:buFont typeface="Arial" panose="020B0604020202020204" pitchFamily="34" charset="0"/>
+              <a:buChar char="•"/>
               <a:defRPr sz="1400" b="0">
                 <a:solidFill>
                   <a:srgbClr val="2B333D"/>
@@ -16114,10 +16182,12 @@
             </a:r>
           </a:p>
           <a:p>
-            <a:pPr>
-              <a:spcAft>
-                <a:spcPts val="300"/>
-              </a:spcAft>
+            <a:pPr marL="285750" indent="-285750">
+              <a:spcAft>
+                <a:spcPts val="300"/>
+              </a:spcAft>
+              <a:buFont typeface="Arial" panose="020B0604020202020204" pitchFamily="34" charset="0"/>
+              <a:buChar char="•"/>
               <a:defRPr sz="1400" b="0">
                 <a:solidFill>
                   <a:srgbClr val="2B333D"/>
@@ -16131,10 +16201,12 @@
             </a:r>
           </a:p>
           <a:p>
-            <a:pPr>
-              <a:spcAft>
-                <a:spcPts val="300"/>
-              </a:spcAft>
+            <a:pPr marL="285750" indent="-285750">
+              <a:spcAft>
+                <a:spcPts val="300"/>
+              </a:spcAft>
+              <a:buFont typeface="Arial" panose="020B0604020202020204" pitchFamily="34" charset="0"/>
+              <a:buChar char="•"/>
               <a:defRPr sz="1400" b="0">
                 <a:solidFill>
                   <a:srgbClr val="2B333D"/>
@@ -16148,10 +16220,12 @@
             </a:r>
           </a:p>
           <a:p>
-            <a:pPr>
-              <a:spcAft>
-                <a:spcPts val="300"/>
-              </a:spcAft>
+            <a:pPr marL="285750" indent="-285750">
+              <a:spcAft>
+                <a:spcPts val="300"/>
+              </a:spcAft>
+              <a:buFont typeface="Arial" panose="020B0604020202020204" pitchFamily="34" charset="0"/>
+              <a:buChar char="•"/>
               <a:defRPr sz="1400" b="0">
                 <a:solidFill>
                   <a:srgbClr val="2B333D"/>
@@ -16165,10 +16239,12 @@
             </a:r>
           </a:p>
           <a:p>
-            <a:pPr>
-              <a:spcAft>
-                <a:spcPts val="300"/>
-              </a:spcAft>
+            <a:pPr marL="285750" indent="-285750">
+              <a:spcAft>
+                <a:spcPts val="300"/>
+              </a:spcAft>
+              <a:buFont typeface="Arial" panose="020B0604020202020204" pitchFamily="34" charset="0"/>
+              <a:buChar char="•"/>
               <a:defRPr sz="1400" b="0">
                 <a:solidFill>
                   <a:srgbClr val="2B333D"/>
@@ -16176,9 +16252,29 @@
                 <a:latin typeface="Aptos"/>
               </a:defRPr>
             </a:pPr>
+            <a:endParaRPr lang="en-US" sz="1600" dirty="0"/>
+          </a:p>
+          <a:p>
+            <a:pPr marL="285750" indent="-285750">
+              <a:spcAft>
+                <a:spcPts val="300"/>
+              </a:spcAft>
+              <a:buFont typeface="Arial" panose="020B0604020202020204" pitchFamily="34" charset="0"/>
+              <a:buChar char="•"/>
+              <a:defRPr sz="1400" b="0">
+                <a:solidFill>
+                  <a:srgbClr val="2B333D"/>
+                </a:solidFill>
+                <a:latin typeface="Aptos"/>
+              </a:defRPr>
+            </a:pPr>
+            <a:r>
+              <a:rPr sz="1600" b="1" dirty="0"/>
+              <a:t>Today</a:t>
+            </a:r>
             <a:r>
               <a:rPr sz="1600" dirty="0"/>
-              <a:t>Today: make AI-assisted work more reliable, verifiable and safe.</a:t>
+              <a:t>: make AI-assisted work more reliable, verifiable and safe.</a:t>
             </a:r>
           </a:p>
         </p:txBody>
